--- a/bodytemplates/4 points/5.pptx
+++ b/bodytemplates/4 points/5.pptx
@@ -259,7 +259,7 @@
           <a:p>
             <a:fld id="{8BDEC0BA-204B-4A7E-AD7C-C2C6570312AB}" type="datetimeFigureOut">
               <a:rPr lang="en-US" smtClean="0"/>
-              <a:t>7/25/2026</a:t>
+              <a:t>8/2/2026</a:t>
             </a:fld>
             <a:endParaRPr lang="en-US"/>
           </a:p>
@@ -457,7 +457,7 @@
           <a:p>
             <a:fld id="{8BDEC0BA-204B-4A7E-AD7C-C2C6570312AB}" type="datetimeFigureOut">
               <a:rPr lang="en-US" smtClean="0"/>
-              <a:t>7/25/2026</a:t>
+              <a:t>8/2/2026</a:t>
             </a:fld>
             <a:endParaRPr lang="en-US"/>
           </a:p>
@@ -665,7 +665,7 @@
           <a:p>
             <a:fld id="{8BDEC0BA-204B-4A7E-AD7C-C2C6570312AB}" type="datetimeFigureOut">
               <a:rPr lang="en-US" smtClean="0"/>
-              <a:t>7/25/2026</a:t>
+              <a:t>8/2/2026</a:t>
             </a:fld>
             <a:endParaRPr lang="en-US"/>
           </a:p>
@@ -863,7 +863,7 @@
           <a:p>
             <a:fld id="{8BDEC0BA-204B-4A7E-AD7C-C2C6570312AB}" type="datetimeFigureOut">
               <a:rPr lang="en-US" smtClean="0"/>
-              <a:t>7/25/2026</a:t>
+              <a:t>8/2/2026</a:t>
             </a:fld>
             <a:endParaRPr lang="en-US"/>
           </a:p>
@@ -1138,7 +1138,7 @@
           <a:p>
             <a:fld id="{8BDEC0BA-204B-4A7E-AD7C-C2C6570312AB}" type="datetimeFigureOut">
               <a:rPr lang="en-US" smtClean="0"/>
-              <a:t>7/25/2026</a:t>
+              <a:t>8/2/2026</a:t>
             </a:fld>
             <a:endParaRPr lang="en-US"/>
           </a:p>
@@ -1403,7 +1403,7 @@
           <a:p>
             <a:fld id="{8BDEC0BA-204B-4A7E-AD7C-C2C6570312AB}" type="datetimeFigureOut">
               <a:rPr lang="en-US" smtClean="0"/>
-              <a:t>7/25/2026</a:t>
+              <a:t>8/2/2026</a:t>
             </a:fld>
             <a:endParaRPr lang="en-US"/>
           </a:p>
@@ -1815,7 +1815,7 @@
           <a:p>
             <a:fld id="{8BDEC0BA-204B-4A7E-AD7C-C2C6570312AB}" type="datetimeFigureOut">
               <a:rPr lang="en-US" smtClean="0"/>
-              <a:t>7/25/2026</a:t>
+              <a:t>8/2/2026</a:t>
             </a:fld>
             <a:endParaRPr lang="en-US"/>
           </a:p>
@@ -1956,7 +1956,7 @@
           <a:p>
             <a:fld id="{8BDEC0BA-204B-4A7E-AD7C-C2C6570312AB}" type="datetimeFigureOut">
               <a:rPr lang="en-US" smtClean="0"/>
-              <a:t>7/25/2026</a:t>
+              <a:t>8/2/2026</a:t>
             </a:fld>
             <a:endParaRPr lang="en-US"/>
           </a:p>
@@ -2069,7 +2069,7 @@
           <a:p>
             <a:fld id="{8BDEC0BA-204B-4A7E-AD7C-C2C6570312AB}" type="datetimeFigureOut">
               <a:rPr lang="en-US" smtClean="0"/>
-              <a:t>7/25/2026</a:t>
+              <a:t>8/2/2026</a:t>
             </a:fld>
             <a:endParaRPr lang="en-US"/>
           </a:p>
@@ -2380,7 +2380,7 @@
           <a:p>
             <a:fld id="{8BDEC0BA-204B-4A7E-AD7C-C2C6570312AB}" type="datetimeFigureOut">
               <a:rPr lang="en-US" smtClean="0"/>
-              <a:t>7/25/2026</a:t>
+              <a:t>8/2/2026</a:t>
             </a:fld>
             <a:endParaRPr lang="en-US"/>
           </a:p>
@@ -2668,7 +2668,7 @@
           <a:p>
             <a:fld id="{8BDEC0BA-204B-4A7E-AD7C-C2C6570312AB}" type="datetimeFigureOut">
               <a:rPr lang="en-US" smtClean="0"/>
-              <a:t>7/25/2026</a:t>
+              <a:t>8/2/2026</a:t>
             </a:fld>
             <a:endParaRPr lang="en-US"/>
           </a:p>
@@ -2909,7 +2909,7 @@
           <a:p>
             <a:fld id="{8BDEC0BA-204B-4A7E-AD7C-C2C6570312AB}" type="datetimeFigureOut">
               <a:rPr lang="en-US" smtClean="0"/>
-              <a:t>7/25/2026</a:t>
+              <a:t>8/2/2026</a:t>
             </a:fld>
             <a:endParaRPr lang="en-US"/>
           </a:p>
@@ -3410,7 +3410,253 @@
       </p:sp>
       <p:sp>
         <p:nvSpPr>
-          <p:cNvPr id="4" name="subpoint">
+          <p:cNvPr id="5" name="content2">
+            <a:extLst>
+              <a:ext uri="{FF2B5EF4-FFF2-40B4-BE49-F238E27FC236}">
+                <a16:creationId xmlns:a16="http://schemas.microsoft.com/office/drawing/2014/main" id="{9F69FFF6-091C-49F4-9E76-F23348677D8A}"/>
+              </a:ext>
+            </a:extLst>
+          </p:cNvPr>
+          <p:cNvSpPr txBox="1"/>
+          <p:nvPr/>
+        </p:nvSpPr>
+        <p:spPr>
+          <a:xfrm>
+            <a:off x="382841" y="3369753"/>
+            <a:ext cx="7843072" cy="646331"/>
+          </a:xfrm>
+          <a:prstGeom prst="rect">
+            <a:avLst/>
+          </a:prstGeom>
+          <a:noFill/>
+          <a:ln>
+            <a:solidFill>
+              <a:schemeClr val="bg1"/>
+            </a:solidFill>
+          </a:ln>
+        </p:spPr>
+        <p:txBody>
+          <a:bodyPr wrap="square" rtlCol="0">
+            <a:spAutoFit/>
+          </a:bodyPr>
+          <a:lstStyle/>
+          <a:p>
+            <a:r>
+              <a:rPr lang="en-IN" dirty="0"/>
+              <a:t>Bullet</a:t>
+            </a:r>
+          </a:p>
+          <a:p>
+            <a:r>
+              <a:rPr lang="en-IN" dirty="0"/>
+              <a:t>details</a:t>
+            </a:r>
+          </a:p>
+        </p:txBody>
+      </p:sp>
+      <p:sp>
+        <p:nvSpPr>
+          <p:cNvPr id="6" name="head2">
+            <a:extLst>
+              <a:ext uri="{FF2B5EF4-FFF2-40B4-BE49-F238E27FC236}">
+                <a16:creationId xmlns:a16="http://schemas.microsoft.com/office/drawing/2014/main" id="{AFFDCB72-714D-48D9-9D04-3C3D30D8C922}"/>
+              </a:ext>
+            </a:extLst>
+          </p:cNvPr>
+          <p:cNvSpPr txBox="1"/>
+          <p:nvPr/>
+        </p:nvSpPr>
+        <p:spPr>
+          <a:xfrm>
+            <a:off x="382840" y="2784978"/>
+            <a:ext cx="7266061" cy="584775"/>
+          </a:xfrm>
+          <a:prstGeom prst="rect">
+            <a:avLst/>
+          </a:prstGeom>
+          <a:noFill/>
+        </p:spPr>
+        <p:txBody>
+          <a:bodyPr wrap="square" rtlCol="0">
+            <a:spAutoFit/>
+          </a:bodyPr>
+          <a:lstStyle/>
+          <a:p>
+            <a:r>
+              <a:rPr lang="en-IN" sz="3200" dirty="0"/>
+              <a:t>Bullet head</a:t>
+            </a:r>
+            <a:endParaRPr lang="en-US" sz="3200" dirty="0"/>
+          </a:p>
+        </p:txBody>
+      </p:sp>
+      <p:sp>
+        <p:nvSpPr>
+          <p:cNvPr id="7" name="content3">
+            <a:extLst>
+              <a:ext uri="{FF2B5EF4-FFF2-40B4-BE49-F238E27FC236}">
+                <a16:creationId xmlns:a16="http://schemas.microsoft.com/office/drawing/2014/main" id="{8523FFB3-2F4C-40C2-A280-B3286C0CC546}"/>
+              </a:ext>
+            </a:extLst>
+          </p:cNvPr>
+          <p:cNvSpPr txBox="1"/>
+          <p:nvPr/>
+        </p:nvSpPr>
+        <p:spPr>
+          <a:xfrm>
+            <a:off x="382841" y="4679267"/>
+            <a:ext cx="7843072" cy="646331"/>
+          </a:xfrm>
+          <a:prstGeom prst="rect">
+            <a:avLst/>
+          </a:prstGeom>
+          <a:noFill/>
+          <a:ln>
+            <a:solidFill>
+              <a:schemeClr val="bg1"/>
+            </a:solidFill>
+          </a:ln>
+        </p:spPr>
+        <p:txBody>
+          <a:bodyPr wrap="square" rtlCol="0">
+            <a:spAutoFit/>
+          </a:bodyPr>
+          <a:lstStyle/>
+          <a:p>
+            <a:r>
+              <a:rPr lang="en-IN" dirty="0"/>
+              <a:t>Bullet</a:t>
+            </a:r>
+          </a:p>
+          <a:p>
+            <a:r>
+              <a:rPr lang="en-IN" dirty="0"/>
+              <a:t>details</a:t>
+            </a:r>
+          </a:p>
+        </p:txBody>
+      </p:sp>
+      <p:sp>
+        <p:nvSpPr>
+          <p:cNvPr id="8" name="head3">
+            <a:extLst>
+              <a:ext uri="{FF2B5EF4-FFF2-40B4-BE49-F238E27FC236}">
+                <a16:creationId xmlns:a16="http://schemas.microsoft.com/office/drawing/2014/main" id="{B18AD21B-02F3-4697-8253-507EB8BD46FD}"/>
+              </a:ext>
+            </a:extLst>
+          </p:cNvPr>
+          <p:cNvSpPr txBox="1"/>
+          <p:nvPr/>
+        </p:nvSpPr>
+        <p:spPr>
+          <a:xfrm>
+            <a:off x="382841" y="4094492"/>
+            <a:ext cx="7266061" cy="584775"/>
+          </a:xfrm>
+          <a:prstGeom prst="rect">
+            <a:avLst/>
+          </a:prstGeom>
+          <a:noFill/>
+        </p:spPr>
+        <p:txBody>
+          <a:bodyPr wrap="square" rtlCol="0">
+            <a:spAutoFit/>
+          </a:bodyPr>
+          <a:lstStyle/>
+          <a:p>
+            <a:r>
+              <a:rPr lang="en-IN" sz="3200" dirty="0"/>
+              <a:t>Bullet head</a:t>
+            </a:r>
+            <a:endParaRPr lang="en-US" sz="3200" dirty="0"/>
+          </a:p>
+        </p:txBody>
+      </p:sp>
+      <p:sp>
+        <p:nvSpPr>
+          <p:cNvPr id="9" name="content4">
+            <a:extLst>
+              <a:ext uri="{FF2B5EF4-FFF2-40B4-BE49-F238E27FC236}">
+                <a16:creationId xmlns:a16="http://schemas.microsoft.com/office/drawing/2014/main" id="{6629448E-A5FD-4CF5-BD16-2113DB16970A}"/>
+              </a:ext>
+            </a:extLst>
+          </p:cNvPr>
+          <p:cNvSpPr txBox="1"/>
+          <p:nvPr/>
+        </p:nvSpPr>
+        <p:spPr>
+          <a:xfrm>
+            <a:off x="382841" y="6010290"/>
+            <a:ext cx="7843072" cy="646331"/>
+          </a:xfrm>
+          <a:prstGeom prst="rect">
+            <a:avLst/>
+          </a:prstGeom>
+          <a:noFill/>
+          <a:ln>
+            <a:solidFill>
+              <a:schemeClr val="bg1"/>
+            </a:solidFill>
+          </a:ln>
+        </p:spPr>
+        <p:txBody>
+          <a:bodyPr wrap="square" rtlCol="0">
+            <a:spAutoFit/>
+          </a:bodyPr>
+          <a:lstStyle/>
+          <a:p>
+            <a:r>
+              <a:rPr lang="en-IN" dirty="0"/>
+              <a:t>Bullet</a:t>
+            </a:r>
+          </a:p>
+          <a:p>
+            <a:r>
+              <a:rPr lang="en-IN" dirty="0"/>
+              <a:t>details</a:t>
+            </a:r>
+          </a:p>
+        </p:txBody>
+      </p:sp>
+      <p:sp>
+        <p:nvSpPr>
+          <p:cNvPr id="10" name="head4">
+            <a:extLst>
+              <a:ext uri="{FF2B5EF4-FFF2-40B4-BE49-F238E27FC236}">
+                <a16:creationId xmlns:a16="http://schemas.microsoft.com/office/drawing/2014/main" id="{F406E6B7-2FB9-4DD4-BFBF-811D17F3A065}"/>
+              </a:ext>
+            </a:extLst>
+          </p:cNvPr>
+          <p:cNvSpPr txBox="1"/>
+          <p:nvPr/>
+        </p:nvSpPr>
+        <p:spPr>
+          <a:xfrm>
+            <a:off x="382840" y="5425515"/>
+            <a:ext cx="7266061" cy="584775"/>
+          </a:xfrm>
+          <a:prstGeom prst="rect">
+            <a:avLst/>
+          </a:prstGeom>
+          <a:noFill/>
+        </p:spPr>
+        <p:txBody>
+          <a:bodyPr wrap="square" rtlCol="0">
+            <a:spAutoFit/>
+          </a:bodyPr>
+          <a:lstStyle/>
+          <a:p>
+            <a:r>
+              <a:rPr lang="en-IN" sz="3200" dirty="0"/>
+              <a:t>Bullet head</a:t>
+            </a:r>
+            <a:endParaRPr lang="en-US" sz="3200" dirty="0"/>
+          </a:p>
+        </p:txBody>
+      </p:sp>
+      <p:sp>
+        <p:nvSpPr>
+          <p:cNvPr id="4" name="subtopic">
             <a:extLst>
               <a:ext uri="{FF2B5EF4-FFF2-40B4-BE49-F238E27FC236}">
                 <a16:creationId xmlns:a16="http://schemas.microsoft.com/office/drawing/2014/main" id="{A8F4D3CF-8E76-4A55-964E-CD794B31C324}"/>
@@ -3445,252 +3691,6 @@
               <a:rPr lang="en-IN" sz="3600" dirty="0"/>
               <a:t>Subpoint</a:t>
             </a:r>
-          </a:p>
-        </p:txBody>
-      </p:sp>
-      <p:sp>
-        <p:nvSpPr>
-          <p:cNvPr id="5" name="content2">
-            <a:extLst>
-              <a:ext uri="{FF2B5EF4-FFF2-40B4-BE49-F238E27FC236}">
-                <a16:creationId xmlns:a16="http://schemas.microsoft.com/office/drawing/2014/main" id="{9F69FFF6-091C-49F4-9E76-F23348677D8A}"/>
-              </a:ext>
-            </a:extLst>
-          </p:cNvPr>
-          <p:cNvSpPr txBox="1"/>
-          <p:nvPr/>
-        </p:nvSpPr>
-        <p:spPr>
-          <a:xfrm>
-            <a:off x="382841" y="3369753"/>
-            <a:ext cx="7843072" cy="646331"/>
-          </a:xfrm>
-          <a:prstGeom prst="rect">
-            <a:avLst/>
-          </a:prstGeom>
-          <a:noFill/>
-          <a:ln>
-            <a:solidFill>
-              <a:schemeClr val="bg1"/>
-            </a:solidFill>
-          </a:ln>
-        </p:spPr>
-        <p:txBody>
-          <a:bodyPr wrap="square" rtlCol="0">
-            <a:spAutoFit/>
-          </a:bodyPr>
-          <a:lstStyle/>
-          <a:p>
-            <a:r>
-              <a:rPr lang="en-IN" dirty="0"/>
-              <a:t>Bullet</a:t>
-            </a:r>
-          </a:p>
-          <a:p>
-            <a:r>
-              <a:rPr lang="en-IN" dirty="0"/>
-              <a:t>details</a:t>
-            </a:r>
-          </a:p>
-        </p:txBody>
-      </p:sp>
-      <p:sp>
-        <p:nvSpPr>
-          <p:cNvPr id="6" name="head2">
-            <a:extLst>
-              <a:ext uri="{FF2B5EF4-FFF2-40B4-BE49-F238E27FC236}">
-                <a16:creationId xmlns:a16="http://schemas.microsoft.com/office/drawing/2014/main" id="{AFFDCB72-714D-48D9-9D04-3C3D30D8C922}"/>
-              </a:ext>
-            </a:extLst>
-          </p:cNvPr>
-          <p:cNvSpPr txBox="1"/>
-          <p:nvPr/>
-        </p:nvSpPr>
-        <p:spPr>
-          <a:xfrm>
-            <a:off x="382840" y="2784978"/>
-            <a:ext cx="7266061" cy="584775"/>
-          </a:xfrm>
-          <a:prstGeom prst="rect">
-            <a:avLst/>
-          </a:prstGeom>
-          <a:noFill/>
-        </p:spPr>
-        <p:txBody>
-          <a:bodyPr wrap="square" rtlCol="0">
-            <a:spAutoFit/>
-          </a:bodyPr>
-          <a:lstStyle/>
-          <a:p>
-            <a:r>
-              <a:rPr lang="en-IN" sz="3200" dirty="0"/>
-              <a:t>Bullet head</a:t>
-            </a:r>
-            <a:endParaRPr lang="en-US" sz="3200" dirty="0"/>
-          </a:p>
-        </p:txBody>
-      </p:sp>
-      <p:sp>
-        <p:nvSpPr>
-          <p:cNvPr id="7" name="content3">
-            <a:extLst>
-              <a:ext uri="{FF2B5EF4-FFF2-40B4-BE49-F238E27FC236}">
-                <a16:creationId xmlns:a16="http://schemas.microsoft.com/office/drawing/2014/main" id="{8523FFB3-2F4C-40C2-A280-B3286C0CC546}"/>
-              </a:ext>
-            </a:extLst>
-          </p:cNvPr>
-          <p:cNvSpPr txBox="1"/>
-          <p:nvPr/>
-        </p:nvSpPr>
-        <p:spPr>
-          <a:xfrm>
-            <a:off x="382841" y="4679267"/>
-            <a:ext cx="7843072" cy="646331"/>
-          </a:xfrm>
-          <a:prstGeom prst="rect">
-            <a:avLst/>
-          </a:prstGeom>
-          <a:noFill/>
-          <a:ln>
-            <a:solidFill>
-              <a:schemeClr val="bg1"/>
-            </a:solidFill>
-          </a:ln>
-        </p:spPr>
-        <p:txBody>
-          <a:bodyPr wrap="square" rtlCol="0">
-            <a:spAutoFit/>
-          </a:bodyPr>
-          <a:lstStyle/>
-          <a:p>
-            <a:r>
-              <a:rPr lang="en-IN" dirty="0"/>
-              <a:t>Bullet</a:t>
-            </a:r>
-          </a:p>
-          <a:p>
-            <a:r>
-              <a:rPr lang="en-IN" dirty="0"/>
-              <a:t>details</a:t>
-            </a:r>
-          </a:p>
-        </p:txBody>
-      </p:sp>
-      <p:sp>
-        <p:nvSpPr>
-          <p:cNvPr id="8" name="head3">
-            <a:extLst>
-              <a:ext uri="{FF2B5EF4-FFF2-40B4-BE49-F238E27FC236}">
-                <a16:creationId xmlns:a16="http://schemas.microsoft.com/office/drawing/2014/main" id="{B18AD21B-02F3-4697-8253-507EB8BD46FD}"/>
-              </a:ext>
-            </a:extLst>
-          </p:cNvPr>
-          <p:cNvSpPr txBox="1"/>
-          <p:nvPr/>
-        </p:nvSpPr>
-        <p:spPr>
-          <a:xfrm>
-            <a:off x="382841" y="4094492"/>
-            <a:ext cx="7266061" cy="584775"/>
-          </a:xfrm>
-          <a:prstGeom prst="rect">
-            <a:avLst/>
-          </a:prstGeom>
-          <a:noFill/>
-        </p:spPr>
-        <p:txBody>
-          <a:bodyPr wrap="square" rtlCol="0">
-            <a:spAutoFit/>
-          </a:bodyPr>
-          <a:lstStyle/>
-          <a:p>
-            <a:r>
-              <a:rPr lang="en-IN" sz="3200" dirty="0"/>
-              <a:t>Bullet head</a:t>
-            </a:r>
-            <a:endParaRPr lang="en-US" sz="3200" dirty="0"/>
-          </a:p>
-        </p:txBody>
-      </p:sp>
-      <p:sp>
-        <p:nvSpPr>
-          <p:cNvPr id="9" name="content4">
-            <a:extLst>
-              <a:ext uri="{FF2B5EF4-FFF2-40B4-BE49-F238E27FC236}">
-                <a16:creationId xmlns:a16="http://schemas.microsoft.com/office/drawing/2014/main" id="{6629448E-A5FD-4CF5-BD16-2113DB16970A}"/>
-              </a:ext>
-            </a:extLst>
-          </p:cNvPr>
-          <p:cNvSpPr txBox="1"/>
-          <p:nvPr/>
-        </p:nvSpPr>
-        <p:spPr>
-          <a:xfrm>
-            <a:off x="382841" y="6010290"/>
-            <a:ext cx="7843072" cy="646331"/>
-          </a:xfrm>
-          <a:prstGeom prst="rect">
-            <a:avLst/>
-          </a:prstGeom>
-          <a:noFill/>
-          <a:ln>
-            <a:solidFill>
-              <a:schemeClr val="bg1"/>
-            </a:solidFill>
-          </a:ln>
-        </p:spPr>
-        <p:txBody>
-          <a:bodyPr wrap="square" rtlCol="0">
-            <a:spAutoFit/>
-          </a:bodyPr>
-          <a:lstStyle/>
-          <a:p>
-            <a:r>
-              <a:rPr lang="en-IN" dirty="0"/>
-              <a:t>Bullet</a:t>
-            </a:r>
-          </a:p>
-          <a:p>
-            <a:r>
-              <a:rPr lang="en-IN" dirty="0"/>
-              <a:t>details</a:t>
-            </a:r>
-          </a:p>
-        </p:txBody>
-      </p:sp>
-      <p:sp>
-        <p:nvSpPr>
-          <p:cNvPr id="10" name="head4">
-            <a:extLst>
-              <a:ext uri="{FF2B5EF4-FFF2-40B4-BE49-F238E27FC236}">
-                <a16:creationId xmlns:a16="http://schemas.microsoft.com/office/drawing/2014/main" id="{F406E6B7-2FB9-4DD4-BFBF-811D17F3A065}"/>
-              </a:ext>
-            </a:extLst>
-          </p:cNvPr>
-          <p:cNvSpPr txBox="1"/>
-          <p:nvPr/>
-        </p:nvSpPr>
-        <p:spPr>
-          <a:xfrm>
-            <a:off x="382840" y="5425515"/>
-            <a:ext cx="7266061" cy="584775"/>
-          </a:xfrm>
-          <a:prstGeom prst="rect">
-            <a:avLst/>
-          </a:prstGeom>
-          <a:noFill/>
-        </p:spPr>
-        <p:txBody>
-          <a:bodyPr wrap="square" rtlCol="0">
-            <a:spAutoFit/>
-          </a:bodyPr>
-          <a:lstStyle/>
-          <a:p>
-            <a:r>
-              <a:rPr lang="en-IN" sz="3200" dirty="0"/>
-              <a:t>Bullet head</a:t>
-            </a:r>
-            <a:endParaRPr lang="en-US" sz="3200" dirty="0"/>
           </a:p>
         </p:txBody>
       </p:sp>
